--- a/docs/presentations/bob-2025-11-19/presentation.pptx
+++ b/docs/presentations/bob-2025-11-19/presentation.pptx
@@ -23,9 +23,10 @@
     <p:sldId id="271" r:id="rId17"/>
     <p:sldId id="272" r:id="rId18"/>
     <p:sldId id="273" r:id="rId19"/>
+    <p:sldId id="274" r:id="rId20"/>
   </p:sldIdLst>
   <p:notesMasterIdLst>
-    <p:notesMasterId r:id="rId20"/>
+    <p:notesMasterId r:id="rId21"/>
   </p:notesMasterIdLst>
   <p:sldSz cx="9144000" cy="5143500"/>
   <p:notesSz cx="5143500" cy="9144000"/>
@@ -1335,6 +1336,94 @@
             <a:fld id="{F7021451-1387-4CA6-816F-3879F97B5CBC}" type="slidenum">
               <a:rPr lang="en-US"/>
               <a:t>18</a:t>
+            </a:fld>
+            <a:endParaRPr lang="en-US"/>
+          </a:p>
+        </p:txBody>
+      </p:sp>
+    </p:spTree>
+    <p:extLst>
+      <p:ext uri="{BB962C8B-B14F-4D97-AF65-F5344CB8AC3E}">
+        <p14:creationId xmlns:p14="http://schemas.microsoft.com/office/powerpoint/2010/main" val="1024086991"/>
+      </p:ext>
+    </p:extLst>
+  </p:cSld>
+  <p:clrMapOvr>
+    <a:masterClrMapping/>
+  </p:clrMapOvr>
+</p:notes>
+</file>
+
+<file path=ppt/notesSlides/notesSlide19.xml><?xml version="1.0" encoding="utf-8"?>
+<p:notes xmlns:a="http://schemas.openxmlformats.org/drawingml/2006/main" xmlns:r="http://schemas.openxmlformats.org/officeDocument/2006/relationships" xmlns:p="http://schemas.openxmlformats.org/presentationml/2006/main">
+  <p:cSld>
+    <p:spTree>
+      <p:nvGrpSpPr>
+        <p:cNvPr id="1" name=""/>
+        <p:cNvGrpSpPr/>
+        <p:nvPr/>
+      </p:nvGrpSpPr>
+      <p:grpSpPr>
+        <a:xfrm>
+          <a:off x="0" y="0"/>
+          <a:ext cx="0" cy="0"/>
+          <a:chOff x="0" y="0"/>
+          <a:chExt cx="0" cy="0"/>
+        </a:xfrm>
+      </p:grpSpPr>
+      <p:sp>
+        <p:nvSpPr>
+          <p:cNvPr id="2" name="Slide Image Placeholder 1"/>
+          <p:cNvSpPr>
+            <a:spLocks noGrp="1" noRot="1" noChangeAspect="1"/>
+          </p:cNvSpPr>
+          <p:nvPr>
+            <p:ph type="sldImg"/>
+          </p:nvPr>
+        </p:nvSpPr>
+        <p:spPr/>
+      </p:sp>
+      <p:sp>
+        <p:nvSpPr>
+          <p:cNvPr id="3" name="Notes Placeholder 2"/>
+          <p:cNvSpPr>
+            <a:spLocks noGrp="1"/>
+          </p:cNvSpPr>
+          <p:nvPr>
+            <p:ph type="body" idx="1"/>
+          </p:nvPr>
+        </p:nvSpPr>
+        <p:spPr/>
+        <p:txBody>
+          <a:bodyPr/>
+          <a:lstStyle/>
+          <a:p>
+            <a:r>
+              <a:rPr lang="en-US" dirty="0"/>
+              <a:t/>
+            </a:r>
+            <a:endParaRPr lang="en-US" dirty="0"/>
+          </a:p>
+        </p:txBody>
+      </p:sp>
+      <p:sp>
+        <p:nvSpPr>
+          <p:cNvPr id="4" name="Slide Number Placeholder 3"/>
+          <p:cNvSpPr>
+            <a:spLocks noGrp="1"/>
+          </p:cNvSpPr>
+          <p:nvPr>
+            <p:ph type="sldNum" sz="quarter" idx="10"/>
+          </p:nvPr>
+        </p:nvSpPr>
+        <p:spPr/>
+        <p:txBody>
+          <a:bodyPr/>
+          <a:lstStyle/>
+          <a:p>
+            <a:fld id="{F7021451-1387-4CA6-816F-3879F97B5CBC}" type="slidenum">
+              <a:rPr lang="en-US"/>
+              <a:t>19</a:t>
             </a:fld>
             <a:endParaRPr lang="en-US"/>
           </a:p>
@@ -8918,6 +9007,554 @@
     <p:bg>
       <p:bgPr>
         <a:solidFill>
+          <a:srgbClr val="FFFFFF"/>
+        </a:solidFill>
+      </p:bgPr>
+    </p:bg>
+    <p:spTree>
+      <p:nvGrpSpPr>
+        <p:cNvPr id="1" name=""/>
+        <p:cNvGrpSpPr/>
+        <p:nvPr/>
+      </p:nvGrpSpPr>
+      <p:grpSpPr>
+        <a:xfrm>
+          <a:off x="0" y="0"/>
+          <a:ext cx="0" cy="0"/>
+          <a:chOff x="0" y="0"/>
+          <a:chExt cx="0" cy="0"/>
+        </a:xfrm>
+      </p:grpSpPr>
+      <p:sp>
+        <p:nvSpPr>
+          <p:cNvPr id="2" name="Text 0"/>
+          <p:cNvSpPr/>
+          <p:nvPr/>
+        </p:nvSpPr>
+        <p:spPr>
+          <a:xfrm>
+            <a:off x="0" y="0"/>
+            <a:ext cx="9144000" cy="1059656"/>
+          </a:xfrm>
+          <a:prstGeom prst="rect">
+            <a:avLst/>
+          </a:prstGeom>
+          <a:solidFill>
+            <a:srgbClr val="87A96B"/>
+          </a:solidFill>
+          <a:ln/>
+        </p:spPr>
+        <p:txBody>
+          <a:bodyPr wrap="square" rtlCol="0" anchor="ctr"/>
+          <a:lstStyle/>
+          <a:p>
+            <a:pPr indent="0" marL="0">
+              <a:buNone/>
+            </a:pPr>
+            <a:endParaRPr lang="en-US" dirty="0"/>
+          </a:p>
+        </p:txBody>
+      </p:sp>
+      <p:sp>
+        <p:nvSpPr>
+          <p:cNvPr id="3" name="Text 1"/>
+          <p:cNvSpPr/>
+          <p:nvPr/>
+        </p:nvSpPr>
+        <p:spPr>
+          <a:xfrm>
+            <a:off x="507950" y="152400"/>
+            <a:ext cx="8290661" cy="371475"/>
+          </a:xfrm>
+          <a:prstGeom prst="rect">
+            <a:avLst/>
+          </a:prstGeom>
+          <a:noFill/>
+          <a:ln/>
+        </p:spPr>
+        <p:txBody>
+          <a:bodyPr wrap="square" lIns="0" tIns="0" rIns="0" bIns="0" rtlCol="0" anchor="t"/>
+          <a:lstStyle/>
+          <a:p>
+            <a:pPr algn="l" indent="0" marL="0">
+              <a:buNone/>
+            </a:pPr>
+            <a:r>
+              <a:rPr lang="en-US" sz="2600" b="1" dirty="0">
+                <a:solidFill>
+                  <a:srgbClr val="FFFFFF"/>
+                </a:solidFill>
+                <a:latin typeface="Arial" pitchFamily="34" charset="0"/>
+                <a:ea typeface="Arial" pitchFamily="34" charset="-122"/>
+                <a:cs typeface="Arial" pitchFamily="34" charset="-120"/>
+              </a:rPr>
+              <a:t>Alternative: promptfoo.dev</a:t>
+            </a:r>
+            <a:endParaRPr lang="en-US" sz="2600" dirty="0"/>
+          </a:p>
+        </p:txBody>
+      </p:sp>
+      <p:sp>
+        <p:nvSpPr>
+          <p:cNvPr id="4" name="Text 2"/>
+          <p:cNvSpPr/>
+          <p:nvPr/>
+        </p:nvSpPr>
+        <p:spPr>
+          <a:xfrm>
+            <a:off x="507950" y="574625"/>
+            <a:ext cx="8290661" cy="231130"/>
+          </a:xfrm>
+          <a:prstGeom prst="rect">
+            <a:avLst/>
+          </a:prstGeom>
+          <a:noFill/>
+          <a:ln/>
+        </p:spPr>
+        <p:txBody>
+          <a:bodyPr wrap="square" lIns="0" tIns="0" rIns="0" bIns="0" rtlCol="0" anchor="t"/>
+          <a:lstStyle/>
+          <a:p>
+            <a:pPr algn="l" indent="0" marL="0">
+              <a:lnSpc>
+                <a:spcPts val="1820"/>
+              </a:lnSpc>
+              <a:spcBef>
+                <a:spcPts val="400"/>
+              </a:spcBef>
+              <a:buNone/>
+            </a:pPr>
+            <a:r>
+              <a:rPr lang="en-US" sz="1400" dirty="0">
+                <a:solidFill>
+                  <a:srgbClr val="F4F1DE"/>
+                </a:solidFill>
+                <a:latin typeface="Arial" pitchFamily="34" charset="0"/>
+                <a:ea typeface="Arial" pitchFamily="34" charset="-122"/>
+                <a:cs typeface="Arial" pitchFamily="34" charset="-120"/>
+              </a:rPr>
+              <a:t>LLM Evaluation Framework</a:t>
+            </a:r>
+            <a:endParaRPr lang="en-US" sz="1400" dirty="0"/>
+          </a:p>
+        </p:txBody>
+      </p:sp>
+      <p:sp>
+        <p:nvSpPr>
+          <p:cNvPr id="5" name="Text 3"/>
+          <p:cNvSpPr/>
+          <p:nvPr/>
+        </p:nvSpPr>
+        <p:spPr>
+          <a:xfrm>
+            <a:off x="634901" y="1313557"/>
+            <a:ext cx="8031682" cy="238125"/>
+          </a:xfrm>
+          <a:prstGeom prst="rect">
+            <a:avLst/>
+          </a:prstGeom>
+          <a:noFill/>
+          <a:ln/>
+        </p:spPr>
+        <p:txBody>
+          <a:bodyPr wrap="square" lIns="0" tIns="0" rIns="0" bIns="0" rtlCol="0" anchor="t"/>
+          <a:lstStyle/>
+          <a:p>
+            <a:pPr algn="l" indent="0" marL="0">
+              <a:spcAft>
+                <a:spcPts val="800"/>
+              </a:spcAft>
+              <a:buNone/>
+            </a:pPr>
+            <a:r>
+              <a:rPr lang="en-US" sz="1600" b="1" dirty="0">
+                <a:solidFill>
+                  <a:srgbClr val="E07A5F"/>
+                </a:solidFill>
+                <a:latin typeface="Arial" pitchFamily="34" charset="0"/>
+                <a:ea typeface="Arial" pitchFamily="34" charset="-122"/>
+                <a:cs typeface="Arial" pitchFamily="34" charset="-120"/>
+              </a:rPr>
+              <a:t>Could We Have Used an Existing Tool?</a:t>
+            </a:r>
+            <a:endParaRPr lang="en-US" sz="1600" dirty="0"/>
+          </a:p>
+        </p:txBody>
+      </p:sp>
+      <p:sp>
+        <p:nvSpPr>
+          <p:cNvPr id="6" name="Text 4"/>
+          <p:cNvSpPr/>
+          <p:nvPr/>
+        </p:nvSpPr>
+        <p:spPr>
+          <a:xfrm>
+            <a:off x="634901" y="1653183"/>
+            <a:ext cx="8031682" cy="231130"/>
+          </a:xfrm>
+          <a:prstGeom prst="rect">
+            <a:avLst/>
+          </a:prstGeom>
+          <a:noFill/>
+          <a:ln/>
+        </p:spPr>
+        <p:txBody>
+          <a:bodyPr wrap="square" lIns="0" tIns="0" rIns="0" bIns="0" rtlCol="0" anchor="t"/>
+          <a:lstStyle/>
+          <a:p>
+            <a:pPr algn="l" indent="0" marL="0">
+              <a:lnSpc>
+                <a:spcPts val="1820"/>
+              </a:lnSpc>
+              <a:spcBef>
+                <a:spcPts val="800"/>
+              </a:spcBef>
+              <a:spcAft>
+                <a:spcPts val="800"/>
+              </a:spcAft>
+              <a:buNone/>
+            </a:pPr>
+            <a:r>
+              <a:rPr lang="en-US" sz="1400" b="1" dirty="0">
+                <a:solidFill>
+                  <a:srgbClr val="E07A5F"/>
+                </a:solidFill>
+                <a:latin typeface="Arial" pitchFamily="34" charset="0"/>
+                <a:ea typeface="Arial" pitchFamily="34" charset="-122"/>
+                <a:cs typeface="Arial" pitchFamily="34" charset="-120"/>
+              </a:rPr>
+              <a:t>promptfoo</a:t>
+            </a:r>
+            <a:pPr algn="l" indent="0" marL="0">
+              <a:lnSpc>
+                <a:spcPts val="1820"/>
+              </a:lnSpc>
+              <a:spcBef>
+                <a:spcPts val="800"/>
+              </a:spcBef>
+              <a:spcAft>
+                <a:spcPts val="800"/>
+              </a:spcAft>
+              <a:buNone/>
+            </a:pPr>
+            <a:r>
+              <a:rPr lang="en-US" sz="1400" dirty="0">
+                <a:solidFill>
+                  <a:srgbClr val="2C2C2C"/>
+                </a:solidFill>
+                <a:latin typeface="Arial" pitchFamily="34" charset="0"/>
+                <a:ea typeface="Arial" pitchFamily="34" charset="-122"/>
+                <a:cs typeface="Arial" pitchFamily="34" charset="-120"/>
+              </a:rPr>
+              <a:t> is an open-source LLM evaluation framework that offers:</a:t>
+            </a:r>
+            <a:endParaRPr lang="en-US" sz="1400" dirty="0"/>
+          </a:p>
+        </p:txBody>
+      </p:sp>
+      <p:sp>
+        <p:nvSpPr>
+          <p:cNvPr id="7" name="Text 5"/>
+          <p:cNvSpPr/>
+          <p:nvPr/>
+        </p:nvSpPr>
+        <p:spPr>
+          <a:xfrm>
+            <a:off x="634901" y="1985814"/>
+            <a:ext cx="7874198" cy="845790"/>
+          </a:xfrm>
+          <a:prstGeom prst="rect">
+            <a:avLst/>
+          </a:prstGeom>
+          <a:noFill/>
+          <a:ln/>
+        </p:spPr>
+        <p:txBody>
+          <a:bodyPr wrap="square" lIns="152400" tIns="0" rIns="0" bIns="0" rtlCol="0" anchor="t"/>
+          <a:lstStyle/>
+          <a:p>
+            <a:pPr algn="l" marL="152400" indent="-152400">
+              <a:lnSpc>
+                <a:spcPts val="1820"/>
+              </a:lnSpc>
+              <a:spcAft>
+                <a:spcPts val="600"/>
+              </a:spcAft>
+              <a:buSzPct val="100000"/>
+              <a:buChar char="•"/>
+            </a:pPr>
+            <a:r>
+              <a:rPr lang="en-US" sz="1400" dirty="0">
+                <a:solidFill>
+                  <a:srgbClr val="2C2C2C"/>
+                </a:solidFill>
+                <a:latin typeface="Arial" pitchFamily="34" charset="0"/>
+                <a:ea typeface="Arial" pitchFamily="34" charset="-122"/>
+                <a:cs typeface="Arial" pitchFamily="34" charset="-120"/>
+              </a:rPr>
+              <a:t>Multi-model testing with custom evaluation criteria</a:t>
+            </a:r>
+            <a:endParaRPr lang="en-US" sz="1400" dirty="0"/>
+          </a:p>
+          <a:p>
+            <a:pPr algn="l" marL="152400" indent="-152400">
+              <a:lnSpc>
+                <a:spcPts val="1820"/>
+              </a:lnSpc>
+              <a:spcAft>
+                <a:spcPts val="600"/>
+              </a:spcAft>
+              <a:buSzPct val="100000"/>
+              <a:buChar char="•"/>
+            </a:pPr>
+            <a:r>
+              <a:rPr lang="en-US" sz="1400" dirty="0">
+                <a:solidFill>
+                  <a:srgbClr val="2C2C2C"/>
+                </a:solidFill>
+                <a:latin typeface="Arial" pitchFamily="34" charset="0"/>
+                <a:ea typeface="Arial" pitchFamily="34" charset="-122"/>
+                <a:cs typeface="Arial" pitchFamily="34" charset="-120"/>
+              </a:rPr>
+              <a:t>LLM-as-judge for pairwise comparisons</a:t>
+            </a:r>
+            <a:endParaRPr lang="en-US" sz="1400" dirty="0"/>
+          </a:p>
+          <a:p>
+            <a:pPr algn="l" marL="152400" indent="-152400">
+              <a:lnSpc>
+                <a:spcPts val="1820"/>
+              </a:lnSpc>
+              <a:spcAft>
+                <a:spcPts val="600"/>
+              </a:spcAft>
+              <a:buSzPct val="100000"/>
+              <a:buChar char="•"/>
+            </a:pPr>
+            <a:r>
+              <a:rPr lang="en-US" sz="1400" dirty="0">
+                <a:solidFill>
+                  <a:srgbClr val="2C2C2C"/>
+                </a:solidFill>
+                <a:latin typeface="Arial" pitchFamily="34" charset="0"/>
+                <a:ea typeface="Arial" pitchFamily="34" charset="-122"/>
+                <a:cs typeface="Arial" pitchFamily="34" charset="-120"/>
+              </a:rPr>
+              <a:t>Built-in web viewer and reporting</a:t>
+            </a:r>
+            <a:endParaRPr lang="en-US" sz="1400" dirty="0"/>
+          </a:p>
+        </p:txBody>
+      </p:sp>
+      <p:sp>
+        <p:nvSpPr>
+          <p:cNvPr id="8" name="Text 6"/>
+          <p:cNvSpPr/>
+          <p:nvPr/>
+        </p:nvSpPr>
+        <p:spPr>
+          <a:xfrm>
+            <a:off x="634901" y="2984004"/>
+            <a:ext cx="7874198" cy="1314896"/>
+          </a:xfrm>
+          <a:prstGeom prst="rect">
+            <a:avLst/>
+          </a:prstGeom>
+          <a:solidFill>
+            <a:srgbClr val="F4F1DE"/>
+          </a:solidFill>
+          <a:ln/>
+        </p:spPr>
+        <p:txBody>
+          <a:bodyPr wrap="square" rtlCol="0" anchor="ctr"/>
+          <a:lstStyle/>
+          <a:p>
+            <a:pPr indent="0" marL="0">
+              <a:buNone/>
+            </a:pPr>
+            <a:endParaRPr lang="en-US" dirty="0"/>
+          </a:p>
+        </p:txBody>
+      </p:sp>
+      <p:sp>
+        <p:nvSpPr>
+          <p:cNvPr id="9" name="Shape 7"/>
+          <p:cNvSpPr/>
+          <p:nvPr/>
+        </p:nvSpPr>
+        <p:spPr>
+          <a:xfrm>
+            <a:off x="658713" y="2984004"/>
+            <a:ext cx="0" cy="1314896"/>
+          </a:xfrm>
+          <a:prstGeom prst="line">
+            <a:avLst/>
+          </a:prstGeom>
+          <a:noFill/>
+          <a:ln w="47625">
+            <a:solidFill>
+              <a:srgbClr val="87A96B"/>
+            </a:solidFill>
+            <a:prstDash val="solid"/>
+          </a:ln>
+        </p:spPr>
+      </p:sp>
+      <p:sp>
+        <p:nvSpPr>
+          <p:cNvPr id="10" name="Text 8"/>
+          <p:cNvSpPr/>
+          <p:nvPr/>
+        </p:nvSpPr>
+        <p:spPr>
+          <a:xfrm>
+            <a:off x="834926" y="3187154"/>
+            <a:ext cx="7672209" cy="643384"/>
+          </a:xfrm>
+          <a:prstGeom prst="rect">
+            <a:avLst/>
+          </a:prstGeom>
+          <a:noFill/>
+          <a:ln/>
+        </p:spPr>
+        <p:txBody>
+          <a:bodyPr wrap="square" lIns="0" tIns="0" rIns="0" bIns="0" rtlCol="0" anchor="t"/>
+          <a:lstStyle/>
+          <a:p>
+            <a:pPr algn="l" indent="0" marL="0">
+              <a:lnSpc>
+                <a:spcPts val="1690"/>
+              </a:lnSpc>
+              <a:spcBef>
+                <a:spcPts val="400"/>
+              </a:spcBef>
+              <a:spcAft>
+                <a:spcPts val="400"/>
+              </a:spcAft>
+              <a:buNone/>
+            </a:pPr>
+            <a:r>
+              <a:rPr lang="en-US" sz="1300" b="1" dirty="0">
+                <a:solidFill>
+                  <a:srgbClr val="2C2C2C"/>
+                </a:solidFill>
+                <a:latin typeface="Arial" pitchFamily="34" charset="0"/>
+                <a:ea typeface="Arial" pitchFamily="34" charset="-122"/>
+                <a:cs typeface="Arial" pitchFamily="34" charset="-120"/>
+              </a:rPr>
+              <a:t>Reality check:</a:t>
+            </a:r>
+            <a:pPr algn="l" indent="0" marL="0">
+              <a:lnSpc>
+                <a:spcPts val="1690"/>
+              </a:lnSpc>
+              <a:spcBef>
+                <a:spcPts val="400"/>
+              </a:spcBef>
+              <a:spcAft>
+                <a:spcPts val="400"/>
+              </a:spcAft>
+              <a:buNone/>
+            </a:pPr>
+            <a:r>
+              <a:rPr lang="en-US" sz="1300" dirty="0">
+                <a:solidFill>
+                  <a:srgbClr val="2C2C2C"/>
+                </a:solidFill>
+                <a:latin typeface="Arial" pitchFamily="34" charset="0"/>
+                <a:ea typeface="Arial" pitchFamily="34" charset="-122"/>
+                <a:cs typeface="Arial" pitchFamily="34" charset="-120"/>
+              </a:rPr>
+              <a:t> promptfoo came to attention late in the game. Even if discovered earlier, steep learning curve to harness appropriately for our specific needs (bidirectional testing, custom HTML reports, statistical aggregation).</a:t>
+            </a:r>
+            <a:endParaRPr lang="en-US" sz="1300" dirty="0"/>
+          </a:p>
+        </p:txBody>
+      </p:sp>
+      <p:sp>
+        <p:nvSpPr>
+          <p:cNvPr id="11" name="Text 9"/>
+          <p:cNvSpPr/>
+          <p:nvPr/>
+        </p:nvSpPr>
+        <p:spPr>
+          <a:xfrm>
+            <a:off x="834926" y="3881289"/>
+            <a:ext cx="7672209" cy="214461"/>
+          </a:xfrm>
+          <a:prstGeom prst="rect">
+            <a:avLst/>
+          </a:prstGeom>
+          <a:noFill/>
+          <a:ln/>
+        </p:spPr>
+        <p:txBody>
+          <a:bodyPr wrap="square" lIns="0" tIns="0" rIns="0" bIns="0" rtlCol="0" anchor="t"/>
+          <a:lstStyle/>
+          <a:p>
+            <a:pPr algn="l" indent="0" marL="0">
+              <a:lnSpc>
+                <a:spcPts val="1690"/>
+              </a:lnSpc>
+              <a:spcBef>
+                <a:spcPts val="400"/>
+              </a:spcBef>
+              <a:spcAft>
+                <a:spcPts val="400"/>
+              </a:spcAft>
+              <a:buNone/>
+            </a:pPr>
+            <a:r>
+              <a:rPr lang="en-US" sz="1300" b="1" dirty="0">
+                <a:solidFill>
+                  <a:srgbClr val="2C2C2C"/>
+                </a:solidFill>
+                <a:latin typeface="Arial" pitchFamily="34" charset="0"/>
+                <a:ea typeface="Arial" pitchFamily="34" charset="-122"/>
+                <a:cs typeface="Arial" pitchFamily="34" charset="-120"/>
+              </a:rPr>
+              <a:t>Future work:</a:t>
+            </a:r>
+            <a:pPr algn="l" indent="0" marL="0">
+              <a:lnSpc>
+                <a:spcPts val="1690"/>
+              </a:lnSpc>
+              <a:spcBef>
+                <a:spcPts val="400"/>
+              </a:spcBef>
+              <a:spcAft>
+                <a:spcPts val="400"/>
+              </a:spcAft>
+              <a:buNone/>
+            </a:pPr>
+            <a:r>
+              <a:rPr lang="en-US" sz="1300" dirty="0">
+                <a:solidFill>
+                  <a:srgbClr val="2C2C2C"/>
+                </a:solidFill>
+                <a:latin typeface="Arial" pitchFamily="34" charset="0"/>
+                <a:ea typeface="Arial" pitchFamily="34" charset="-122"/>
+                <a:cs typeface="Arial" pitchFamily="34" charset="-120"/>
+              </a:rPr>
+              <a:t> Should be on radar for VEuPathDB AI projects.</a:t>
+            </a:r>
+            <a:endParaRPr lang="en-US" sz="1300" dirty="0"/>
+          </a:p>
+        </p:txBody>
+      </p:sp>
+    </p:spTree>
+  </p:cSld>
+  <p:clrMapOvr>
+    <a:masterClrMapping/>
+  </p:clrMapOvr>
+</p:sld>
+</file>
+
+<file path=ppt/slides/slide19.xml><?xml version="1.0" encoding="utf-8"?>
+<p:sld xmlns:a="http://schemas.openxmlformats.org/drawingml/2006/main" xmlns:r="http://schemas.openxmlformats.org/officeDocument/2006/relationships" xmlns:p="http://schemas.openxmlformats.org/presentationml/2006/main">
+  <p:cSld name="Slide 19">
+    <p:bg>
+      <p:bgPr>
+        <a:solidFill>
           <a:srgbClr val="F4F1DE"/>
         </a:solidFill>
       </p:bgPr>
